--- a/dist/초5/수학/곱셈과어림/초5_수학_곱셈과어림_01_수의범위.pptx
+++ b/dist/초5/수학/곱셈과어림/초5_수학_곱셈과어림_01_수의범위.pptx
@@ -121,13 +121,13 @@
   <p:extLst>
     <p:ext uri="{521415D9-36F7-43E2-AB2F-B90AF26B5E84}">
       <p14:sectionLst xmlns:p14="http://schemas.microsoft.com/office/powerpoint/2010/main">
-        <p14:section name="도입" id="{c9902c29-e1e5-260c-76b0-f552ae074ad2}">
+        <p14:section name="도입" id="{da0078e2-cb68-da0c-a266-b29589e8721c}">
           <p14:sldIdLst>
             <p14:sldId id="256"/>
             <p14:sldId id="257"/>
           </p14:sldIdLst>
         </p14:section>
-        <p14:section name="개념" id="{723da84c-9d41-ddf9-3d66-1d72262ba44c}">
+        <p14:section name="개념" id="{6dbe9204-1c26-56e4-c4da-6109977549d7}">
           <p14:sldIdLst>
             <p14:sldId id="258"/>
             <p14:sldId id="259"/>
@@ -136,32 +136,32 @@
             <p14:sldId id="263"/>
           </p14:sldIdLst>
         </p14:section>
-        <p14:section name="연습" id="{9d6d50c2-4d48-8ced-7559-6ac47d0729c9}">
+        <p14:section name="연습" id="{5d3b391f-d3c6-82f3-12d4-d406306cf64e}">
           <p14:sldIdLst>
             <p14:sldId id="260"/>
             <p14:sldId id="264"/>
             <p14:sldId id="265"/>
           </p14:sldIdLst>
         </p14:section>
-        <p14:section name="개념" id="{6cc14b72-a459-4aa5-4be9-55efb033eded}">
+        <p14:section name="개념" id="{773728be-6496-f5e2-9f0d-3077eacc12fe}">
           <p14:sldIdLst/>
         </p14:section>
-        <p14:section name="연습" id="{e1672514-679c-9fc7-2164-91ede751b78a}">
+        <p14:section name="연습" id="{b9cfb984-62ff-eca2-135d-8de97cd772e7}">
           <p14:sldIdLst/>
         </p14:section>
-        <p14:section name="확인" id="{f35d77ae-2c8a-6794-2884-d5db4a868a30}">
+        <p14:section name="확인" id="{865a4c07-7e60-1249-e9d0-ce72c798138b}">
           <p14:sldIdLst>
             <p14:sldId id="266"/>
             <p14:sldId id="267"/>
             <p14:sldId id="268"/>
           </p14:sldIdLst>
         </p14:section>
-        <p14:section name="정리" id="{5b96c0a4-55bc-9c3b-7020-94598246bfbf}">
+        <p14:section name="정리" id="{4bfff528-a683-8672-acf4-d9b510049e63}">
           <p14:sldIdLst>
             <p14:sldId id="269"/>
           </p14:sldIdLst>
         </p14:section>
-        <p14:section name="보충" id="{9d1581a2-8e2e-c5ea-9362-1c0350655aa7}">
+        <p14:section name="보충" id="{2ca65cb2-4954-9b42-8bfe-254d8521f081}">
           <p14:sldIdLst>
             <p14:sldId id="270"/>
           </p14:sldIdLst>
